--- a/docs/lectures/index.pptx
+++ b/docs/lectures/index.pptx
@@ -3294,7 +3294,7 @@
             </a:pPr>
             <a:r>
               <a:rPr/>
-              <a:t>Lecctues</a:t>
+              <a:t>Course Lectures</a:t>
             </a:r>
           </a:p>
         </p:txBody>
